--- a/paper/Lujan_de_Cuyo_Gestion_Suelo_Clase.pptx
+++ b/paper/Lujan_de_Cuyo_Gestion_Suelo_Clase.pptx
@@ -14338,7 +14338,7 @@
         <p:spPr>
           <a:xfrm>
             <a:off x="640080" y="1691640"/>
-            <a:ext cx="7315200" cy="4101689"/>
+            <a:ext cx="7315200" cy="4064000"/>
           </a:xfrm>
           <a:prstGeom prst="rect">
             <a:avLst/>
